--- a/deck/SIH26171_Idea_Submission.pptx
+++ b/deck/SIH26171_Idea_Submission.pptx
@@ -7622,7 +7622,7 @@
                   <a:srgbClr val="141B2E"/>
                 </a:solidFill>
               </a:rPr>
-              <a:t>•  Hostile-page defences: 15 attack cases refused</a:t>
+              <a:t>•  Hostile-page defences: 16 of 24 validator cases refused</a:t>
             </a:r>
           </a:p>
           <a:p>
@@ -7738,7 +7738,7 @@
         <p:spPr>
           <a:xfrm>
             <a:off x="6537960" y="1371600"/>
-            <a:ext cx="4937760" cy="4572000"/>
+            <a:ext cx="4937760" cy="457200"/>
           </a:xfrm>
           <a:prstGeom prst="rect">
             <a:avLst/>
@@ -7765,19 +7765,313 @@
               <a:t>Performance — measured, both ends</a:t>
             </a:r>
           </a:p>
+        </p:txBody>
+      </p:sp>
+      <p:sp>
+        <p:nvSpPr>
+          <p:cNvPr id="17413" name="TextBox 17412"/>
+          <p:cNvSpPr txBox="1"/>
+          <p:nvPr/>
+        </p:nvSpPr>
+        <p:spPr>
+          <a:xfrm>
+            <a:off x="6537960" y="1783080"/>
+            <a:ext cx="2286000" cy="1737360"/>
+          </a:xfrm>
+          <a:prstGeom prst="rect">
+            <a:avLst/>
+          </a:prstGeom>
+          <a:noFill/>
+        </p:spPr>
+        <p:txBody>
+          <a:bodyPr wrap="square">
+            <a:spAutoFit/>
+          </a:bodyPr>
+          <a:lstStyle/>
           <a:p>
             <a:pPr>
               <a:spcAft>
+                <a:spcPts val="500"/>
+              </a:spcAft>
+            </a:pPr>
+          </a:p>
+          <a:p>
+            <a:pPr>
+              <a:spcAft>
+                <a:spcPts val="500"/>
+              </a:spcAft>
+            </a:pPr>
+            <a:r>
+              <a:rPr sz="1200" b="0">
+                <a:solidFill>
+                  <a:srgbClr val="141B2E"/>
+                </a:solidFill>
+              </a:rPr>
+              <a:t>turn total</a:t>
+            </a:r>
+          </a:p>
+          <a:p>
+            <a:pPr>
+              <a:spcAft>
+                <a:spcPts val="500"/>
+              </a:spcAft>
+            </a:pPr>
+            <a:r>
+              <a:rPr sz="1200" b="0">
+                <a:solidFill>
+                  <a:srgbClr val="141B2E"/>
+                </a:solidFill>
+              </a:rPr>
+              <a:t>on-device vision</a:t>
+            </a:r>
+          </a:p>
+          <a:p>
+            <a:pPr>
+              <a:spcAft>
+                <a:spcPts val="500"/>
+              </a:spcAft>
+            </a:pPr>
+            <a:r>
+              <a:rPr sz="1200" b="0">
+                <a:solidFill>
+                  <a:srgbClr val="141B2E"/>
+                </a:solidFill>
+              </a:rPr>
+              <a:t>payload sent</a:t>
+            </a:r>
+          </a:p>
+        </p:txBody>
+      </p:sp>
+      <p:sp>
+        <p:nvSpPr>
+          <p:cNvPr id="17414" name="TextBox 17413"/>
+          <p:cNvSpPr txBox="1"/>
+          <p:nvPr/>
+        </p:nvSpPr>
+        <p:spPr>
+          <a:xfrm>
+            <a:off x="8823960" y="1783080"/>
+            <a:ext cx="1234440" cy="1737360"/>
+          </a:xfrm>
+          <a:prstGeom prst="rect">
+            <a:avLst/>
+          </a:prstGeom>
+          <a:noFill/>
+        </p:spPr>
+        <p:txBody>
+          <a:bodyPr wrap="square">
+            <a:spAutoFit/>
+          </a:bodyPr>
+          <a:lstStyle/>
+          <a:p>
+            <a:pPr algn="r">
+              <a:spcAft>
+                <a:spcPts val="500"/>
+              </a:spcAft>
+            </a:pPr>
+            <a:r>
+              <a:rPr sz="1200" b="1">
+                <a:solidFill>
+                  <a:srgbClr val="535C6B"/>
+                </a:solidFill>
+              </a:rPr>
+              <a:t>dev machine</a:t>
+            </a:r>
+          </a:p>
+          <a:p>
+            <a:pPr algn="r">
+              <a:spcAft>
+                <a:spcPts val="500"/>
+              </a:spcAft>
+            </a:pPr>
+            <a:r>
+              <a:rPr sz="1200" b="0">
+                <a:solidFill>
+                  <a:srgbClr val="141B2E"/>
+                </a:solidFill>
+              </a:rPr>
+              <a:t>3.7 s</a:t>
+            </a:r>
+          </a:p>
+          <a:p>
+            <a:pPr algn="r">
+              <a:spcAft>
+                <a:spcPts val="500"/>
+              </a:spcAft>
+            </a:pPr>
+            <a:r>
+              <a:rPr sz="1200" b="0">
+                <a:solidFill>
+                  <a:srgbClr val="141B2E"/>
+                </a:solidFill>
+              </a:rPr>
+              <a:t>65 ms</a:t>
+            </a:r>
+          </a:p>
+          <a:p>
+            <a:pPr algn="r">
+              <a:spcAft>
+                <a:spcPts val="500"/>
+              </a:spcAft>
+            </a:pPr>
+            <a:r>
+              <a:rPr sz="1200" b="0">
+                <a:solidFill>
+                  <a:srgbClr val="141B2E"/>
+                </a:solidFill>
+              </a:rPr>
+              <a:t>47 KB</a:t>
+            </a:r>
+          </a:p>
+        </p:txBody>
+      </p:sp>
+      <p:sp>
+        <p:nvSpPr>
+          <p:cNvPr id="17415" name="TextBox 17414"/>
+          <p:cNvSpPr txBox="1"/>
+          <p:nvPr/>
+        </p:nvSpPr>
+        <p:spPr>
+          <a:xfrm>
+            <a:off x="10058400" y="1783080"/>
+            <a:ext cx="1234440" cy="1737360"/>
+          </a:xfrm>
+          <a:prstGeom prst="rect">
+            <a:avLst/>
+          </a:prstGeom>
+          <a:noFill/>
+        </p:spPr>
+        <p:txBody>
+          <a:bodyPr wrap="square">
+            <a:spAutoFit/>
+          </a:bodyPr>
+          <a:lstStyle/>
+          <a:p>
+            <a:pPr algn="r">
+              <a:spcAft>
+                <a:spcPts val="500"/>
+              </a:spcAft>
+            </a:pPr>
+            <a:r>
+              <a:rPr sz="1200" b="1">
+                <a:solidFill>
+                  <a:srgbClr val="535C6B"/>
+                </a:solidFill>
+              </a:rPr>
+              <a:t>low-end laptop</a:t>
+            </a:r>
+          </a:p>
+          <a:p>
+            <a:pPr algn="r">
+              <a:spcAft>
+                <a:spcPts val="500"/>
+              </a:spcAft>
+            </a:pPr>
+            <a:r>
+              <a:rPr sz="1200" b="0">
+                <a:solidFill>
+                  <a:srgbClr val="141B2E"/>
+                </a:solidFill>
+              </a:rPr>
+              <a:t>4.7 s</a:t>
+            </a:r>
+          </a:p>
+          <a:p>
+            <a:pPr algn="r">
+              <a:spcAft>
+                <a:spcPts val="500"/>
+              </a:spcAft>
+            </a:pPr>
+            <a:r>
+              <a:rPr sz="1200" b="0">
+                <a:solidFill>
+                  <a:srgbClr val="141B2E"/>
+                </a:solidFill>
+              </a:rPr>
+              <a:t>~1030 ms</a:t>
+            </a:r>
+          </a:p>
+          <a:p>
+            <a:pPr algn="r">
+              <a:spcAft>
+                <a:spcPts val="500"/>
+              </a:spcAft>
+            </a:pPr>
+            <a:r>
+              <a:rPr sz="1200" b="0">
+                <a:solidFill>
+                  <a:srgbClr val="141B2E"/>
+                </a:solidFill>
+              </a:rPr>
+              <a:t>47 KB</a:t>
+            </a:r>
+          </a:p>
+        </p:txBody>
+      </p:sp>
+      <p:sp>
+        <p:nvSpPr>
+          <p:cNvPr id="17416" name="TextBox 17415"/>
+          <p:cNvSpPr txBox="1"/>
+          <p:nvPr/>
+        </p:nvSpPr>
+        <p:spPr>
+          <a:xfrm>
+            <a:off x="6537960" y="3337560"/>
+            <a:ext cx="4937760" cy="2560320"/>
+          </a:xfrm>
+          <a:prstGeom prst="rect">
+            <a:avLst/>
+          </a:prstGeom>
+          <a:noFill/>
+        </p:spPr>
+        <p:txBody>
+          <a:bodyPr wrap="square">
+            <a:spAutoFit/>
+          </a:bodyPr>
+          <a:lstStyle/>
+          <a:p>
+            <a:pPr>
+              <a:spcAft>
+                <a:spcPts val="1000"/>
+              </a:spcAft>
+            </a:pPr>
+            <a:r>
+              <a:rPr sz="900" b="0">
+                <a:solidFill>
+                  <a:srgbClr val="535C6B"/>
+                </a:solidFill>
+              </a:rPr>
+              <a:t>Low-end figures are from a 6x CPU-throttled run, not an estimate.</a:t>
+            </a:r>
+          </a:p>
+          <a:p>
+            <a:pPr>
+              <a:spcAft>
+                <a:spcPts val="600"/>
+              </a:spcAft>
+            </a:pPr>
+            <a:r>
+              <a:rPr sz="1300" b="1">
+                <a:solidFill>
+                  <a:srgbClr val="B46A00"/>
+                </a:solidFill>
+              </a:rPr>
+              <a:t>Honest limits</a:t>
+            </a:r>
+          </a:p>
+          <a:p>
+            <a:pPr>
+              <a:spcAft>
                 <a:spcPts val="400"/>
               </a:spcAft>
             </a:pPr>
             <a:r>
-              <a:rPr sz="1200" b="1">
+              <a:rPr sz="1200" b="0">
                 <a:solidFill>
                   <a:srgbClr val="535C6B"/>
                 </a:solidFill>
               </a:rPr>
-              <a:t>                          dev machine      low-end laptop</a:t>
+              <a:t>•  Hindi is the only Indian language covered. A form labelled solely in Tamil, Bengali or Telugu is not yet handled, and we say so rather than wait to be asked.</a:t>
             </a:r>
           </a:p>
           <a:p>
@@ -7789,100 +8083,25 @@
             <a:r>
               <a:rPr sz="1200" b="0">
                 <a:solidFill>
-                  <a:srgbClr val="141B2E"/>
-                </a:solidFill>
-              </a:rPr>
-              <a:t>turn total            3.7 s                    4.7 s</a:t>
+                  <a:srgbClr val="535C6B"/>
+                </a:solidFill>
+              </a:rPr>
+              <a:t>•  Devanagari names in running prose are missed — the name tokeniser is Latin-only. Devanagari form fields do work.</a:t>
             </a:r>
           </a:p>
           <a:p>
             <a:pPr>
               <a:spcAft>
-                <a:spcPts val="400"/>
+                <a:spcPts val="200"/>
               </a:spcAft>
             </a:pPr>
             <a:r>
               <a:rPr sz="1200" b="0">
                 <a:solidFill>
-                  <a:srgbClr val="141B2E"/>
-                </a:solidFill>
-              </a:rPr>
-              <a:t>on-device vision   65 ms                   ~1030 ms</a:t>
-            </a:r>
-          </a:p>
-          <a:p>
-            <a:pPr>
-              <a:spcAft>
-                <a:spcPts val="1000"/>
-              </a:spcAft>
-            </a:pPr>
-            <a:r>
-              <a:rPr sz="1200" b="0">
-                <a:solidFill>
-                  <a:srgbClr val="141B2E"/>
-                </a:solidFill>
-              </a:rPr>
-              <a:t>payload sent        47 KB                   47 KB</a:t>
-            </a:r>
-          </a:p>
-          <a:p>
-            <a:pPr>
-              <a:spcAft>
-                <a:spcPts val="1000"/>
-              </a:spcAft>
-            </a:pPr>
-            <a:r>
-              <a:rPr sz="900" b="0">
-                <a:solidFill>
                   <a:srgbClr val="535C6B"/>
                 </a:solidFill>
               </a:rPr>
-              <a:t>Low-end figures are from a 6x CPU-throttled run, not an estimate.</a:t>
-            </a:r>
-          </a:p>
-          <a:p>
-            <a:pPr>
-              <a:spcAft>
-                <a:spcPts val="600"/>
-              </a:spcAft>
-            </a:pPr>
-            <a:r>
-              <a:rPr sz="1300" b="1">
-                <a:solidFill>
-                  <a:srgbClr val="B46A00"/>
-                </a:solidFill>
-              </a:rPr>
-              <a:t>Honest limits</a:t>
-            </a:r>
-          </a:p>
-          <a:p>
-            <a:pPr>
-              <a:spcAft>
-                <a:spcPts val="400"/>
-              </a:spcAft>
-            </a:pPr>
-            <a:r>
-              <a:rPr sz="1200" b="0">
-                <a:solidFill>
-                  <a:srgbClr val="535C6B"/>
-                </a:solidFill>
-              </a:rPr>
-              <a:t>•  A person's name with no labelling cue and absent from any public name list is still missed. Closing it needs a 103 MB model against a 20%-weighted resource budget — priced, and declined.</a:t>
-            </a:r>
-          </a:p>
-          <a:p>
-            <a:pPr>
-              <a:spcAft>
-                <a:spcPts val="200"/>
-              </a:spcAft>
-            </a:pPr>
-            <a:r>
-              <a:rPr sz="1200" b="0">
-                <a:solidFill>
-                  <a:srgbClr val="535C6B"/>
-                </a:solidFill>
-              </a:rPr>
-              <a:t>•  Test corpus is 5 pages. Small, and stated as such.</a:t>
+              <a:t>•  Test corpus is 12 fixtures plus 4 real sites. Small, and stated as such: every page shape we have added found a real defect.</a:t>
             </a:r>
           </a:p>
         </p:txBody>
@@ -8454,7 +8673,7 @@
         <p:spPr>
           <a:xfrm>
             <a:off x="6537960" y="1371600"/>
-            <a:ext cx="4937760" cy="4572000"/>
+            <a:ext cx="4937760" cy="457200"/>
           </a:xfrm>
           <a:prstGeom prst="rect">
             <a:avLst/>
@@ -8481,6 +8700,29 @@
               <a:t>Results on UNSEEN test pages</a:t>
             </a:r>
           </a:p>
+        </p:txBody>
+      </p:sp>
+      <p:sp>
+        <p:nvSpPr>
+          <p:cNvPr id="17413" name="TextBox 17412"/>
+          <p:cNvSpPr txBox="1"/>
+          <p:nvPr/>
+        </p:nvSpPr>
+        <p:spPr>
+          <a:xfrm>
+            <a:off x="6537960" y="1783080"/>
+            <a:ext cx="3520440" cy="2103120"/>
+          </a:xfrm>
+          <a:prstGeom prst="rect">
+            <a:avLst/>
+          </a:prstGeom>
+          <a:noFill/>
+        </p:spPr>
+        <p:txBody>
+          <a:bodyPr wrap="square">
+            <a:spAutoFit/>
+          </a:bodyPr>
+          <a:lstStyle/>
           <a:p>
             <a:pPr>
               <a:spcAft>
@@ -8493,7 +8735,7 @@
                   <a:srgbClr val="141B2E"/>
                 </a:solidFill>
               </a:rPr>
-              <a:t>Visual context accuracy                    100%</a:t>
+              <a:t>Visual context accuracy</a:t>
             </a:r>
           </a:p>
           <a:p>
@@ -8508,7 +8750,7 @@
                   <a:srgbClr val="141B2E"/>
                 </a:solidFill>
               </a:rPr>
-              <a:t>PII detection precision                      100%</a:t>
+              <a:t>PII detection precision</a:t>
             </a:r>
           </a:p>
           <a:p>
@@ -8523,7 +8765,7 @@
                   <a:srgbClr val="141B2E"/>
                 </a:solidFill>
               </a:rPr>
-              <a:t>PII detection recall                            91.7%</a:t>
+              <a:t>PII detection recall</a:t>
             </a:r>
           </a:p>
           <a:p>
@@ -8538,13 +8780,13 @@
                   <a:srgbClr val="141B2E"/>
                 </a:solidFill>
               </a:rPr>
-              <a:t>Redaction precision                          100%</a:t>
+              <a:t>Redaction precision</a:t>
             </a:r>
           </a:p>
           <a:p>
             <a:pPr>
               <a:spcAft>
-                <a:spcPts val="1200"/>
+                <a:spcPts val="500"/>
               </a:spcAft>
             </a:pPr>
             <a:r>
@@ -8553,22 +8795,158 @@
                   <a:srgbClr val="1B7A3D"/>
                 </a:solidFill>
               </a:rPr>
-              <a:t>Data leaks                                          0</a:t>
-            </a:r>
-          </a:p>
+              <a:t>Data leaks</a:t>
+            </a:r>
+          </a:p>
+        </p:txBody>
+      </p:sp>
+      <p:sp>
+        <p:nvSpPr>
+          <p:cNvPr id="17414" name="TextBox 17413"/>
+          <p:cNvSpPr txBox="1"/>
+          <p:nvPr/>
+        </p:nvSpPr>
+        <p:spPr>
+          <a:xfrm>
+            <a:off x="10058400" y="1783080"/>
+            <a:ext cx="1051560" cy="2103120"/>
+          </a:xfrm>
+          <a:prstGeom prst="rect">
+            <a:avLst/>
+          </a:prstGeom>
+          <a:noFill/>
+        </p:spPr>
+        <p:txBody>
+          <a:bodyPr wrap="square">
+            <a:spAutoFit/>
+          </a:bodyPr>
+          <a:lstStyle/>
+          <a:p>
+            <a:pPr algn="r">
+              <a:spcAft>
+                <a:spcPts val="500"/>
+              </a:spcAft>
+            </a:pPr>
+            <a:r>
+              <a:rPr sz="1300" b="0">
+                <a:solidFill>
+                  <a:srgbClr val="141B2E"/>
+                </a:solidFill>
+              </a:rPr>
+              <a:t>100%</a:t>
+            </a:r>
+          </a:p>
+          <a:p>
+            <a:pPr algn="r">
+              <a:spcAft>
+                <a:spcPts val="500"/>
+              </a:spcAft>
+            </a:pPr>
+            <a:r>
+              <a:rPr sz="1300" b="0">
+                <a:solidFill>
+                  <a:srgbClr val="141B2E"/>
+                </a:solidFill>
+              </a:rPr>
+              <a:t>100%</a:t>
+            </a:r>
+          </a:p>
+          <a:p>
+            <a:pPr algn="r">
+              <a:spcAft>
+                <a:spcPts val="500"/>
+              </a:spcAft>
+            </a:pPr>
+            <a:r>
+              <a:rPr sz="1300" b="0">
+                <a:solidFill>
+                  <a:srgbClr val="141B2E"/>
+                </a:solidFill>
+              </a:rPr>
+              <a:t>100%</a:t>
+            </a:r>
+          </a:p>
+          <a:p>
+            <a:pPr algn="r">
+              <a:spcAft>
+                <a:spcPts val="500"/>
+              </a:spcAft>
+            </a:pPr>
+            <a:r>
+              <a:rPr sz="1300" b="0">
+                <a:solidFill>
+                  <a:srgbClr val="141B2E"/>
+                </a:solidFill>
+              </a:rPr>
+              <a:t>100%</a:t>
+            </a:r>
+          </a:p>
+          <a:p>
+            <a:pPr algn="r">
+              <a:spcAft>
+                <a:spcPts val="500"/>
+              </a:spcAft>
+            </a:pPr>
+            <a:r>
+              <a:rPr sz="1300" b="1">
+                <a:solidFill>
+                  <a:srgbClr val="1B7A3D"/>
+                </a:solidFill>
+              </a:rPr>
+              <a:t>0</a:t>
+            </a:r>
+          </a:p>
+        </p:txBody>
+      </p:sp>
+      <p:sp>
+        <p:nvSpPr>
+          <p:cNvPr id="17415" name="TextBox 17414"/>
+          <p:cNvSpPr txBox="1"/>
+          <p:nvPr/>
+        </p:nvSpPr>
+        <p:spPr>
+          <a:xfrm>
+            <a:off x="6537960" y="3383280"/>
+            <a:ext cx="4937760" cy="2468880"/>
+          </a:xfrm>
+          <a:prstGeom prst="rect">
+            <a:avLst/>
+          </a:prstGeom>
+          <a:noFill/>
+        </p:spPr>
+        <p:txBody>
+          <a:bodyPr wrap="square">
+            <a:spAutoFit/>
+          </a:bodyPr>
+          <a:lstStyle/>
           <a:p>
             <a:pPr>
               <a:spcAft>
+                <a:spcPts val="600"/>
+              </a:spcAft>
+            </a:pPr>
+            <a:r>
+              <a:rPr sz="1200" b="0">
+                <a:solidFill>
+                  <a:srgbClr val="535C6B"/>
+                </a:solidFill>
+              </a:rPr>
+              <a:t>These are the HOLDOUT numbers — pages written before any tuning and never optimised against, because the evaluation sites are revealed on the day.</a:t>
+            </a:r>
+          </a:p>
+          <a:p>
+            <a:pPr>
+              <a:spcAft>
                 <a:spcPts val="800"/>
               </a:spcAft>
             </a:pPr>
             <a:r>
-              <a:rPr sz="1200" b="0">
+              <a:rPr sz="900" b="0">
                 <a:solidFill>
                   <a:srgbClr val="535C6B"/>
                 </a:solidFill>
               </a:rPr>
-              <a:t>These are the HOLDOUT numbers — pages written before any tuning and never optimised against, because the evaluation sites are revealed on the day.</a:t>
+              <a:t>The suite ships its own counterfactual: disabling the name layer drops holdout recall to 91.7% and tuned recall to 86.8%. The column is reproducible, not rounded.</a:t>
             </a:r>
           </a:p>
           <a:p>

--- a/deck/SIH26171_Idea_Submission.pptx
+++ b/deck/SIH26171_Idea_Submission.pptx
@@ -8101,7 +8101,7 @@
                   <a:srgbClr val="535C6B"/>
                 </a:solidFill>
               </a:rPr>
-              <a:t>•  Test corpus is 12 fixtures plus 4 real sites. Small, and stated as such: every page shape we have added found a real defect.</a:t>
+              <a:t>•  Test corpus is 12 tuned fixtures, 2 holdout and 4 real sites. Small, and stated as such: every page shape added has found a real defect — the newest found a leak through the screenshot.</a:t>
             </a:r>
           </a:p>
         </p:txBody>

--- a/deck/SIH26171_Idea_Submission.pptx
+++ b/deck/SIH26171_Idea_Submission.pptx
@@ -7628,6 +7628,21 @@
           <a:p>
             <a:pPr>
               <a:spcAft>
+                <a:spcPts val="400"/>
+              </a:spcAft>
+            </a:pPr>
+            <a:r>
+              <a:rPr sz="1200" b="0">
+                <a:solidFill>
+                  <a:srgbClr val="141B2E"/>
+                </a:solidFill>
+              </a:rPr>
+              <a:t>•  Graceful failure — 8/8 drills</a:t>
+            </a:r>
+          </a:p>
+          <a:p>
+            <a:pPr>
+              <a:spcAft>
                 <a:spcPts val="1200"/>
               </a:spcAft>
             </a:pPr>
@@ -7637,7 +7652,7 @@
                   <a:srgbClr val="141B2E"/>
                 </a:solidFill>
               </a:rPr>
-              <a:t>•  Graceful failure — 8/8 drills</a:t>
+              <a:t>•  Field labels in 11 Indian languages, not just English</a:t>
             </a:r>
           </a:p>
           <a:p>
@@ -8071,7 +8086,7 @@
                   <a:srgbClr val="535C6B"/>
                 </a:solidFill>
               </a:rPr>
-              <a:t>•  Hindi is the only Indian language covered. A form labelled solely in Tamil, Bengali or Telugu is not yet handled, and we say so rather than wait to be asked.</a:t>
+              <a:t>•  Eleven languages have field vocabularies, but only Tamil and Bengali are backed by fixtures. The other eight need a native reader's review, and we say so rather than claim eleven.</a:t>
             </a:r>
           </a:p>
           <a:p>
@@ -8086,7 +8101,7 @@
                   <a:srgbClr val="535C6B"/>
                 </a:solidFill>
               </a:rPr>
-              <a:t>•  Devanagari names in running prose are missed — the name tokeniser is Latin-only. Devanagari form fields do work.</a:t>
+              <a:t>•  Names in running prose are Latin-only — the tokeniser does not segment Indic scripts. Form fields in all eleven do work.</a:t>
             </a:r>
           </a:p>
           <a:p>
@@ -8101,7 +8116,7 @@
                   <a:srgbClr val="535C6B"/>
                 </a:solidFill>
               </a:rPr>
-              <a:t>•  Test corpus is 12 tuned fixtures, 2 holdout and 4 real sites. Small, and stated as such: every page shape added has found a real defect — the newest found a leak through the screenshot.</a:t>
+              <a:t>•  Test corpus is 14 tuned fixtures, 2 holdout and 4 real sites. Small, and stated as such: every page shape added has found a real defect — the newest found a leak through the screenshot.</a:t>
             </a:r>
           </a:p>
         </p:txBody>
